--- a/UNIUBE-PDI/Slides/04 - Histograma e Equalizacao.pptx
+++ b/UNIUBE-PDI/Slides/04 - Histograma e Equalizacao.pptx
@@ -1886,7 +1886,7 @@
           <a:p>
             <a:fld id="{6ED03497-8374-466E-85FA-95E1138D8F6E}" type="datetimeFigureOut">
               <a:rPr lang="pt-BR" smtClean="0"/>
-              <a:t>31/08/2026</a:t>
+              <a:t>01/09/2026</a:t>
             </a:fld>
             <a:endParaRPr lang="pt-BR"/>
           </a:p>
@@ -4865,7 +4865,7 @@
           <a:p>
             <a:fld id="{A87E3B6E-8316-4A1C-BADA-DB7F3456EEF1}" type="datetimeFigureOut">
               <a:rPr lang="pt-BR" smtClean="0"/>
-              <a:t>31/08/2026</a:t>
+              <a:t>01/09/2026</a:t>
             </a:fld>
             <a:endParaRPr lang="pt-BR"/>
           </a:p>
@@ -5063,7 +5063,7 @@
           <a:p>
             <a:fld id="{A87E3B6E-8316-4A1C-BADA-DB7F3456EEF1}" type="datetimeFigureOut">
               <a:rPr lang="pt-BR" smtClean="0"/>
-              <a:t>31/08/2026</a:t>
+              <a:t>01/09/2026</a:t>
             </a:fld>
             <a:endParaRPr lang="pt-BR"/>
           </a:p>
@@ -5271,7 +5271,7 @@
           <a:p>
             <a:fld id="{A87E3B6E-8316-4A1C-BADA-DB7F3456EEF1}" type="datetimeFigureOut">
               <a:rPr lang="pt-BR" smtClean="0"/>
-              <a:t>31/08/2026</a:t>
+              <a:t>01/09/2026</a:t>
             </a:fld>
             <a:endParaRPr lang="pt-BR"/>
           </a:p>
@@ -5507,7 +5507,7 @@
           <a:p>
             <a:fld id="{A87E3B6E-8316-4A1C-BADA-DB7F3456EEF1}" type="datetimeFigureOut">
               <a:rPr lang="pt-BR" smtClean="0"/>
-              <a:t>31/08/2026</a:t>
+              <a:t>01/09/2026</a:t>
             </a:fld>
             <a:endParaRPr lang="pt-BR"/>
           </a:p>
@@ -5677,7 +5677,7 @@
           <a:p>
             <a:fld id="{A87E3B6E-8316-4A1C-BADA-DB7F3456EEF1}" type="datetimeFigureOut">
               <a:rPr lang="pt-BR" smtClean="0"/>
-              <a:t>31/08/2026</a:t>
+              <a:t>01/09/2026</a:t>
             </a:fld>
             <a:endParaRPr lang="pt-BR"/>
           </a:p>
@@ -5945,7 +5945,7 @@
           <a:p>
             <a:fld id="{A87E3B6E-8316-4A1C-BADA-DB7F3456EEF1}" type="datetimeFigureOut">
               <a:rPr lang="pt-BR" smtClean="0"/>
-              <a:t>31/08/2026</a:t>
+              <a:t>01/09/2026</a:t>
             </a:fld>
             <a:endParaRPr lang="pt-BR"/>
           </a:p>
@@ -6177,7 +6177,7 @@
           <a:p>
             <a:fld id="{A87E3B6E-8316-4A1C-BADA-DB7F3456EEF1}" type="datetimeFigureOut">
               <a:rPr lang="pt-BR" smtClean="0"/>
-              <a:t>31/08/2026</a:t>
+              <a:t>01/09/2026</a:t>
             </a:fld>
             <a:endParaRPr lang="pt-BR"/>
           </a:p>
@@ -6532,7 +6532,7 @@
           <a:p>
             <a:fld id="{A87E3B6E-8316-4A1C-BADA-DB7F3456EEF1}" type="datetimeFigureOut">
               <a:rPr lang="pt-BR" smtClean="0"/>
-              <a:t>31/08/2026</a:t>
+              <a:t>01/09/2026</a:t>
             </a:fld>
             <a:endParaRPr lang="pt-BR"/>
           </a:p>
@@ -6673,7 +6673,7 @@
           <a:p>
             <a:fld id="{A87E3B6E-8316-4A1C-BADA-DB7F3456EEF1}" type="datetimeFigureOut">
               <a:rPr lang="pt-BR" smtClean="0"/>
-              <a:t>31/08/2026</a:t>
+              <a:t>01/09/2026</a:t>
             </a:fld>
             <a:endParaRPr lang="pt-BR"/>
           </a:p>
@@ -6768,7 +6768,7 @@
           <a:p>
             <a:fld id="{A87E3B6E-8316-4A1C-BADA-DB7F3456EEF1}" type="datetimeFigureOut">
               <a:rPr lang="pt-BR" smtClean="0"/>
-              <a:t>31/08/2026</a:t>
+              <a:t>01/09/2026</a:t>
             </a:fld>
             <a:endParaRPr lang="pt-BR"/>
           </a:p>
@@ -7132,7 +7132,7 @@
           <a:p>
             <a:fld id="{A87E3B6E-8316-4A1C-BADA-DB7F3456EEF1}" type="datetimeFigureOut">
               <a:rPr lang="pt-BR" smtClean="0"/>
-              <a:t>31/08/2026</a:t>
+              <a:t>01/09/2026</a:t>
             </a:fld>
             <a:endParaRPr lang="pt-BR"/>
           </a:p>
@@ -7333,7 +7333,7 @@
           <a:p>
             <a:fld id="{A87E3B6E-8316-4A1C-BADA-DB7F3456EEF1}" type="datetimeFigureOut">
               <a:rPr lang="pt-BR" smtClean="0"/>
-              <a:t>31/08/2026</a:t>
+              <a:t>01/09/2026</a:t>
             </a:fld>
             <a:endParaRPr lang="pt-BR"/>
           </a:p>
@@ -7693,7 +7693,7 @@
           <a:p>
             <a:fld id="{A87E3B6E-8316-4A1C-BADA-DB7F3456EEF1}" type="datetimeFigureOut">
               <a:rPr lang="pt-BR" smtClean="0"/>
-              <a:t>31/08/2026</a:t>
+              <a:t>01/09/2026</a:t>
             </a:fld>
             <a:endParaRPr lang="pt-BR"/>
           </a:p>
@@ -7878,7 +7878,7 @@
           <a:p>
             <a:fld id="{A87E3B6E-8316-4A1C-BADA-DB7F3456EEF1}" type="datetimeFigureOut">
               <a:rPr lang="pt-BR" smtClean="0"/>
-              <a:t>31/08/2026</a:t>
+              <a:t>01/09/2026</a:t>
             </a:fld>
             <a:endParaRPr lang="pt-BR"/>
           </a:p>
@@ -8058,7 +8058,7 @@
           <a:p>
             <a:fld id="{A87E3B6E-8316-4A1C-BADA-DB7F3456EEF1}" type="datetimeFigureOut">
               <a:rPr lang="pt-BR" smtClean="0"/>
-              <a:t>31/08/2026</a:t>
+              <a:t>01/09/2026</a:t>
             </a:fld>
             <a:endParaRPr lang="pt-BR"/>
           </a:p>
@@ -8321,7 +8321,7 @@
           <a:p>
             <a:fld id="{A87E3B6E-8316-4A1C-BADA-DB7F3456EEF1}" type="datetimeFigureOut">
               <a:rPr lang="pt-BR" smtClean="0"/>
-              <a:t>31/08/2026</a:t>
+              <a:t>01/09/2026</a:t>
             </a:fld>
             <a:endParaRPr lang="pt-BR"/>
           </a:p>
@@ -8586,7 +8586,7 @@
           <a:p>
             <a:fld id="{A87E3B6E-8316-4A1C-BADA-DB7F3456EEF1}" type="datetimeFigureOut">
               <a:rPr lang="pt-BR" smtClean="0"/>
-              <a:t>31/08/2026</a:t>
+              <a:t>01/09/2026</a:t>
             </a:fld>
             <a:endParaRPr lang="pt-BR"/>
           </a:p>
@@ -8998,7 +8998,7 @@
           <a:p>
             <a:fld id="{A87E3B6E-8316-4A1C-BADA-DB7F3456EEF1}" type="datetimeFigureOut">
               <a:rPr lang="pt-BR" smtClean="0"/>
-              <a:t>31/08/2026</a:t>
+              <a:t>01/09/2026</a:t>
             </a:fld>
             <a:endParaRPr lang="pt-BR"/>
           </a:p>
@@ -9139,7 +9139,7 @@
           <a:p>
             <a:fld id="{A87E3B6E-8316-4A1C-BADA-DB7F3456EEF1}" type="datetimeFigureOut">
               <a:rPr lang="pt-BR" smtClean="0"/>
-              <a:t>31/08/2026</a:t>
+              <a:t>01/09/2026</a:t>
             </a:fld>
             <a:endParaRPr lang="pt-BR"/>
           </a:p>
@@ -9252,7 +9252,7 @@
           <a:p>
             <a:fld id="{A87E3B6E-8316-4A1C-BADA-DB7F3456EEF1}" type="datetimeFigureOut">
               <a:rPr lang="pt-BR" smtClean="0"/>
-              <a:t>31/08/2026</a:t>
+              <a:t>01/09/2026</a:t>
             </a:fld>
             <a:endParaRPr lang="pt-BR"/>
           </a:p>
@@ -9563,7 +9563,7 @@
           <a:p>
             <a:fld id="{A87E3B6E-8316-4A1C-BADA-DB7F3456EEF1}" type="datetimeFigureOut">
               <a:rPr lang="pt-BR" smtClean="0"/>
-              <a:t>31/08/2026</a:t>
+              <a:t>01/09/2026</a:t>
             </a:fld>
             <a:endParaRPr lang="pt-BR"/>
           </a:p>
@@ -9851,7 +9851,7 @@
           <a:p>
             <a:fld id="{A87E3B6E-8316-4A1C-BADA-DB7F3456EEF1}" type="datetimeFigureOut">
               <a:rPr lang="pt-BR" smtClean="0"/>
-              <a:t>31/08/2026</a:t>
+              <a:t>01/09/2026</a:t>
             </a:fld>
             <a:endParaRPr lang="pt-BR"/>
           </a:p>
@@ -10092,7 +10092,7 @@
           <a:p>
             <a:fld id="{A87E3B6E-8316-4A1C-BADA-DB7F3456EEF1}" type="datetimeFigureOut">
               <a:rPr lang="pt-BR" smtClean="0"/>
-              <a:t>31/08/2026</a:t>
+              <a:t>01/09/2026</a:t>
             </a:fld>
             <a:endParaRPr lang="pt-BR"/>
           </a:p>
@@ -10656,7 +10656,7 @@
           <a:p>
             <a:fld id="{A87E3B6E-8316-4A1C-BADA-DB7F3456EEF1}" type="datetimeFigureOut">
               <a:rPr lang="pt-BR" smtClean="0"/>
-              <a:t>31/08/2026</a:t>
+              <a:t>01/09/2026</a:t>
             </a:fld>
             <a:endParaRPr lang="pt-BR"/>
           </a:p>
@@ -11475,8 +11475,8 @@
           </a:p>
         </p:txBody>
       </p:sp>
-      <mc:AlternateContent xmlns:mc="http://schemas.openxmlformats.org/markup-compatibility/2006">
-        <mc:Choice xmlns:a14="http://schemas.microsoft.com/office/drawing/2010/main" Requires="a14">
+      <mc:AlternateContent xmlns:mc="http://schemas.openxmlformats.org/markup-compatibility/2006" xmlns:a14="http://schemas.microsoft.com/office/drawing/2010/main">
+        <mc:Choice Requires="a14">
           <p:sp>
             <p:nvSpPr>
               <p:cNvPr id="9" name="Espaço Reservado para Conteúdo 5">
@@ -11681,13 +11681,7 @@
                       <a:rPr lang="pt-BR" sz="2200" i="1" dirty="0" smtClean="0">
                         <a:latin typeface="Cambria Math" panose="02040503050406030204" pitchFamily="18" charset="0"/>
                       </a:rPr>
-                      <m:t> =  </m:t>
-                    </m:r>
-                    <m:r>
-                      <a:rPr lang="pt-BR" sz="2200" i="1" dirty="0" smtClean="0">
-                        <a:latin typeface="Cambria Math" panose="02040503050406030204" pitchFamily="18" charset="0"/>
-                      </a:rPr>
-                      <m:t>128</m:t>
+                      <m:t> =  128</m:t>
                     </m:r>
                     <m:r>
                       <a:rPr lang="pt-BR" sz="2200" i="1" dirty="0" smtClean="0">
@@ -11699,37 +11693,7 @@
                       <a:rPr lang="pt-BR" sz="2200" i="1" dirty="0" smtClean="0">
                         <a:latin typeface="Cambria Math" panose="02040503050406030204" pitchFamily="18" charset="0"/>
                       </a:rPr>
-                      <m:t>128</m:t>
-                    </m:r>
-                    <m:r>
-                      <a:rPr lang="pt-BR" sz="2200" i="1" dirty="0" smtClean="0">
-                        <a:latin typeface="Cambria Math" panose="02040503050406030204" pitchFamily="18" charset="0"/>
-                      </a:rPr>
-                      <m:t> =  </m:t>
-                    </m:r>
-                    <m:r>
-                      <a:rPr lang="pt-BR" sz="2200" i="1" dirty="0" smtClean="0">
-                        <a:latin typeface="Cambria Math" panose="02040503050406030204" pitchFamily="18" charset="0"/>
-                      </a:rPr>
-                      <m:t>16</m:t>
-                    </m:r>
-                    <m:r>
-                      <a:rPr lang="pt-BR" sz="2200" i="1" dirty="0" smtClean="0">
-                        <a:latin typeface="Cambria Math" panose="02040503050406030204" pitchFamily="18" charset="0"/>
-                      </a:rPr>
-                      <m:t>.</m:t>
-                    </m:r>
-                    <m:r>
-                      <a:rPr lang="pt-BR" sz="2200" i="1" dirty="0" smtClean="0">
-                        <a:latin typeface="Cambria Math" panose="02040503050406030204" pitchFamily="18" charset="0"/>
-                      </a:rPr>
-                      <m:t>384</m:t>
-                    </m:r>
-                    <m:r>
-                      <a:rPr lang="pt-BR" sz="2200" i="1" dirty="0" smtClean="0">
-                        <a:latin typeface="Cambria Math" panose="02040503050406030204" pitchFamily="18" charset="0"/>
-                      </a:rPr>
-                      <m:t> </m:t>
+                      <m:t>128 =  16.384 </m:t>
                     </m:r>
                     <m:r>
                       <a:rPr lang="pt-BR" sz="2200" i="1" dirty="0" smtClean="0">
@@ -11766,73 +11730,13 @@
                       <a:rPr lang="pt-BR" sz="2200" i="1" baseline="-25000" dirty="0">
                         <a:latin typeface="Cambria Math" panose="02040503050406030204" pitchFamily="18" charset="0"/>
                       </a:rPr>
-                      <m:t>⁡(</m:t>
+                      <m:t>⁡(0)</m:t>
                     </m:r>
                     <m:r>
                       <a:rPr lang="pt-BR" sz="2200" i="1" dirty="0">
                         <a:latin typeface="Cambria Math" panose="02040503050406030204" pitchFamily="18" charset="0"/>
                       </a:rPr>
-                      <m:t>0</m:t>
-                    </m:r>
-                    <m:r>
-                      <a:rPr lang="pt-BR" sz="2200" i="1" dirty="0">
-                        <a:latin typeface="Cambria Math" panose="02040503050406030204" pitchFamily="18" charset="0"/>
-                      </a:rPr>
-                      <m:t>) = </m:t>
-                    </m:r>
-                    <m:r>
-                      <a:rPr lang="pt-BR" sz="2200" i="1" dirty="0">
-                        <a:latin typeface="Cambria Math" panose="02040503050406030204" pitchFamily="18" charset="0"/>
-                      </a:rPr>
-                      <m:t>1120</m:t>
-                    </m:r>
-                    <m:r>
-                      <a:rPr lang="pt-BR" sz="2200" i="1" dirty="0">
-                        <a:latin typeface="Cambria Math" panose="02040503050406030204" pitchFamily="18" charset="0"/>
-                      </a:rPr>
-                      <m:t>/</m:t>
-                    </m:r>
-                    <m:r>
-                      <a:rPr lang="pt-BR" sz="2200" i="1" dirty="0">
-                        <a:latin typeface="Cambria Math" panose="02040503050406030204" pitchFamily="18" charset="0"/>
-                      </a:rPr>
-                      <m:t>16</m:t>
-                    </m:r>
-                    <m:r>
-                      <a:rPr lang="pt-BR" sz="2200" i="1" dirty="0">
-                        <a:latin typeface="Cambria Math" panose="02040503050406030204" pitchFamily="18" charset="0"/>
-                      </a:rPr>
-                      <m:t>.</m:t>
-                    </m:r>
-                    <m:r>
-                      <a:rPr lang="pt-BR" sz="2200" i="1" dirty="0">
-                        <a:latin typeface="Cambria Math" panose="02040503050406030204" pitchFamily="18" charset="0"/>
-                      </a:rPr>
-                      <m:t>384</m:t>
-                    </m:r>
-                    <m:r>
-                      <a:rPr lang="pt-BR" sz="2200" i="1" dirty="0">
-                        <a:latin typeface="Cambria Math" panose="02040503050406030204" pitchFamily="18" charset="0"/>
-                      </a:rPr>
-                      <m:t> = </m:t>
-                    </m:r>
-                    <m:r>
-                      <a:rPr lang="pt-BR" sz="2200" i="1" dirty="0">
-                        <a:latin typeface="Cambria Math" panose="02040503050406030204" pitchFamily="18" charset="0"/>
-                      </a:rPr>
-                      <m:t>0</m:t>
-                    </m:r>
-                    <m:r>
-                      <a:rPr lang="pt-BR" sz="2200" i="1" dirty="0">
-                        <a:latin typeface="Cambria Math" panose="02040503050406030204" pitchFamily="18" charset="0"/>
-                      </a:rPr>
-                      <m:t>,</m:t>
-                    </m:r>
-                    <m:r>
-                      <a:rPr lang="pt-BR" sz="2200" i="1" dirty="0">
-                        <a:latin typeface="Cambria Math" panose="02040503050406030204" pitchFamily="18" charset="0"/>
-                      </a:rPr>
-                      <m:t>068</m:t>
+                      <m:t> = 1120/16.384 = 0,068</m:t>
                     </m:r>
                   </m:oMath>
                 </a14:m>
@@ -11863,85 +11767,13 @@
                       <a:rPr lang="pt-BR" sz="2200" i="1" baseline="-25000" dirty="0">
                         <a:latin typeface="Cambria Math" panose="02040503050406030204" pitchFamily="18" charset="0"/>
                       </a:rPr>
-                      <m:t>⁡(</m:t>
+                      <m:t>⁡(1/</m:t>
                     </m:r>
                     <m:r>
                       <a:rPr lang="pt-BR" sz="2200" i="1" dirty="0">
                         <a:latin typeface="Cambria Math" panose="02040503050406030204" pitchFamily="18" charset="0"/>
                       </a:rPr>
-                      <m:t>1</m:t>
-                    </m:r>
-                    <m:r>
-                      <a:rPr lang="pt-BR" sz="2200" i="1" dirty="0">
-                        <a:latin typeface="Cambria Math" panose="02040503050406030204" pitchFamily="18" charset="0"/>
-                      </a:rPr>
-                      <m:t>/</m:t>
-                    </m:r>
-                    <m:r>
-                      <a:rPr lang="pt-BR" sz="2200" i="1" dirty="0">
-                        <a:latin typeface="Cambria Math" panose="02040503050406030204" pitchFamily="18" charset="0"/>
-                      </a:rPr>
-                      <m:t>7</m:t>
-                    </m:r>
-                    <m:r>
-                      <a:rPr lang="pt-BR" sz="2200" i="1" dirty="0">
-                        <a:latin typeface="Cambria Math" panose="02040503050406030204" pitchFamily="18" charset="0"/>
-                      </a:rPr>
-                      <m:t>)= </m:t>
-                    </m:r>
-                    <m:r>
-                      <a:rPr lang="pt-BR" sz="2200" i="1" dirty="0">
-                        <a:latin typeface="Cambria Math" panose="02040503050406030204" pitchFamily="18" charset="0"/>
-                      </a:rPr>
-                      <m:t>3214</m:t>
-                    </m:r>
-                    <m:r>
-                      <a:rPr lang="pt-BR" sz="2200" i="1" dirty="0">
-                        <a:latin typeface="Cambria Math" panose="02040503050406030204" pitchFamily="18" charset="0"/>
-                      </a:rPr>
-                      <m:t>/</m:t>
-                    </m:r>
-                    <m:r>
-                      <a:rPr lang="pt-BR" sz="2200" i="1" dirty="0">
-                        <a:latin typeface="Cambria Math" panose="02040503050406030204" pitchFamily="18" charset="0"/>
-                      </a:rPr>
-                      <m:t>16</m:t>
-                    </m:r>
-                    <m:r>
-                      <a:rPr lang="pt-BR" sz="2200" i="1" dirty="0">
-                        <a:latin typeface="Cambria Math" panose="02040503050406030204" pitchFamily="18" charset="0"/>
-                      </a:rPr>
-                      <m:t>.</m:t>
-                    </m:r>
-                    <m:r>
-                      <a:rPr lang="pt-BR" sz="2200" i="1" dirty="0">
-                        <a:latin typeface="Cambria Math" panose="02040503050406030204" pitchFamily="18" charset="0"/>
-                      </a:rPr>
-                      <m:t>384</m:t>
-                    </m:r>
-                    <m:r>
-                      <a:rPr lang="pt-BR" sz="2200" i="1" dirty="0">
-                        <a:latin typeface="Cambria Math" panose="02040503050406030204" pitchFamily="18" charset="0"/>
-                      </a:rPr>
-                      <m:t> = </m:t>
-                    </m:r>
-                    <m:r>
-                      <a:rPr lang="pt-BR" sz="2200" i="1" dirty="0">
-                        <a:latin typeface="Cambria Math" panose="02040503050406030204" pitchFamily="18" charset="0"/>
-                      </a:rPr>
-                      <m:t>0</m:t>
-                    </m:r>
-                    <m:r>
-                      <a:rPr lang="pt-BR" sz="2200" i="1" dirty="0">
-                        <a:latin typeface="Cambria Math" panose="02040503050406030204" pitchFamily="18" charset="0"/>
-                      </a:rPr>
-                      <m:t>,</m:t>
-                    </m:r>
-                    <m:r>
-                      <a:rPr lang="pt-BR" sz="2200" i="1" dirty="0">
-                        <a:latin typeface="Cambria Math" panose="02040503050406030204" pitchFamily="18" charset="0"/>
-                      </a:rPr>
-                      <m:t>196</m:t>
+                      <m:t>7)= 3214/16.384 = 0,196</m:t>
                     </m:r>
                   </m:oMath>
                 </a14:m>
@@ -11966,7 +11798,7 @@
             </p:txBody>
           </p:sp>
         </mc:Choice>
-        <mc:Fallback>
+        <mc:Fallback xmlns="">
           <p:sp>
             <p:nvSpPr>
               <p:cNvPr id="9" name="Espaço Reservado para Conteúdo 5">
@@ -13014,8 +12846,8 @@
           </a:p>
         </p:txBody>
       </p:sp>
-      <mc:AlternateContent xmlns:mc="http://schemas.openxmlformats.org/markup-compatibility/2006">
-        <mc:Choice xmlns:a14="http://schemas.microsoft.com/office/drawing/2010/main" Requires="a14">
+      <mc:AlternateContent xmlns:mc="http://schemas.openxmlformats.org/markup-compatibility/2006" xmlns:a14="http://schemas.microsoft.com/office/drawing/2010/main">
+        <mc:Choice Requires="a14">
           <p:sp>
             <p:nvSpPr>
               <p:cNvPr id="6" name="Espaço Reservado para Conteúdo 5">
@@ -13275,7 +13107,7 @@
             </p:txBody>
           </p:sp>
         </mc:Choice>
-        <mc:Fallback>
+        <mc:Fallback xmlns="">
           <p:sp>
             <p:nvSpPr>
               <p:cNvPr id="6" name="Espaço Reservado para Conteúdo 5">
@@ -13963,55 +13795,6 @@
                 <a:r>
                   <a:rPr lang="pt-BR" sz="2000" dirty="0"/>
                   <a:t>probabilidade dos níveis;</a:t>
-                </a:r>
-              </a:p>
-              <a:p>
-                <a:pPr lvl="1">
-                  <a:buFont typeface="Courier New" panose="02070309020205020404" pitchFamily="49" charset="0"/>
-                  <a:buChar char="o"/>
-                </a:pPr>
-                <a14:m>
-                  <m:oMath xmlns:m="http://schemas.openxmlformats.org/officeDocument/2006/math">
-                    <m:sSub>
-                      <m:sSubPr>
-                        <m:ctrlPr>
-                          <a:rPr lang="pt-BR" sz="2000" i="1">
-                            <a:latin typeface="Cambria Math" panose="02040503050406030204" pitchFamily="18" charset="0"/>
-                          </a:rPr>
-                        </m:ctrlPr>
-                      </m:sSubPr>
-                      <m:e>
-                        <m:r>
-                          <a:rPr lang="pt-BR" sz="2000" i="1">
-                            <a:latin typeface="Cambria Math" panose="02040503050406030204" pitchFamily="18" charset="0"/>
-                          </a:rPr>
-                          <m:t>𝑟</m:t>
-                        </m:r>
-                      </m:e>
-                      <m:sub>
-                        <m:r>
-                          <a:rPr lang="pt-BR" sz="2000" i="1">
-                            <a:latin typeface="Cambria Math" panose="02040503050406030204" pitchFamily="18" charset="0"/>
-                          </a:rPr>
-                          <m:t>𝑘</m:t>
-                        </m:r>
-                      </m:sub>
-                    </m:sSub>
-                  </m:oMath>
-                </a14:m>
-                <a:r>
-                  <a:rPr lang="pt-BR" sz="2000" dirty="0"/>
-                  <a:t> </a:t>
-                </a:r>
-                <a:r>
-                  <a:rPr lang="pt-BR" sz="2000" dirty="0">
-                    <a:sym typeface="Wingdings" panose="05000000000000000000" pitchFamily="2" charset="2"/>
-                  </a:rPr>
-                  <a:t></a:t>
-                </a:r>
-                <a:r>
-                  <a:rPr lang="pt-BR" sz="2000" dirty="0"/>
-                  <a:t>número de níveis de cinza da imagem;</a:t>
                 </a:r>
               </a:p>
               <a:p>
@@ -14646,8 +14429,8 @@
           </a:p>
         </p:txBody>
       </p:sp>
-      <mc:AlternateContent xmlns:mc="http://schemas.openxmlformats.org/markup-compatibility/2006">
-        <mc:Choice xmlns:a14="http://schemas.microsoft.com/office/drawing/2010/main" Requires="a14">
+      <mc:AlternateContent xmlns:mc="http://schemas.openxmlformats.org/markup-compatibility/2006" xmlns:a14="http://schemas.microsoft.com/office/drawing/2010/main">
+        <mc:Choice Requires="a14">
           <p:sp>
             <p:nvSpPr>
               <p:cNvPr id="6" name="Espaço Reservado para Conteúdo 5">
@@ -14765,13 +14548,7 @@
                       <a:rPr lang="pt-BR" sz="2000" i="1" dirty="0" smtClean="0">
                         <a:latin typeface="Cambria Math" panose="02040503050406030204" pitchFamily="18" charset="0"/>
                       </a:rPr>
-                      <m:t>(2) = 0 + 0,3</m:t>
-                    </m:r>
-                    <m:r>
-                      <a:rPr lang="pt-BR" sz="2000" i="1" dirty="0" smtClean="0">
-                        <a:latin typeface="Cambria Math" panose="02040503050406030204" pitchFamily="18" charset="0"/>
-                      </a:rPr>
-                      <m:t>75 + 0,625 = 1</m:t>
+                      <m:t>(2) = 0 + 0,375 + 0,625 = 1</m:t>
                     </m:r>
                   </m:oMath>
                 </a14:m>
@@ -14794,13 +14571,13 @@
                       <a:rPr lang="pt-BR" sz="2000" i="1" dirty="0" smtClean="0">
                         <a:latin typeface="Cambria Math" panose="02040503050406030204" pitchFamily="18" charset="0"/>
                       </a:rPr>
-                      <m:t>(3) = 0 + 0,375 + </m:t>
+                      <m:t>(3) = 0 + 0,375 + 0,625 + 0 = </m:t>
                     </m:r>
                     <m:r>
                       <a:rPr lang="pt-BR" sz="2000" i="1" dirty="0">
                         <a:latin typeface="Cambria Math" panose="02040503050406030204" pitchFamily="18" charset="0"/>
                       </a:rPr>
-                      <m:t>0,625 + 0 = 1</m:t>
+                      <m:t>1</m:t>
                     </m:r>
                   </m:oMath>
                 </a14:m>
@@ -14813,7 +14590,7 @@
             </p:txBody>
           </p:sp>
         </mc:Choice>
-        <mc:Fallback>
+        <mc:Fallback xmlns="">
           <p:sp>
             <p:nvSpPr>
               <p:cNvPr id="6" name="Espaço Reservado para Conteúdo 5">
@@ -15413,8 +15190,8 @@
           </a:p>
         </p:txBody>
       </p:sp>
-      <mc:AlternateContent xmlns:mc="http://schemas.openxmlformats.org/markup-compatibility/2006">
-        <mc:Choice xmlns:a14="http://schemas.microsoft.com/office/drawing/2010/main" Requires="a14">
+      <mc:AlternateContent xmlns:mc="http://schemas.openxmlformats.org/markup-compatibility/2006" xmlns:a14="http://schemas.microsoft.com/office/drawing/2010/main">
+        <mc:Choice Requires="a14">
           <p:sp>
             <p:nvSpPr>
               <p:cNvPr id="6" name="Espaço Reservado para Conteúdo 5">
@@ -15729,7 +15506,7 @@
             </p:txBody>
           </p:sp>
         </mc:Choice>
-        <mc:Fallback>
+        <mc:Fallback xmlns="">
           <p:sp>
             <p:nvSpPr>
               <p:cNvPr id="6" name="Espaço Reservado para Conteúdo 5">
@@ -15946,8 +15723,8 @@
           </a:p>
         </p:txBody>
       </p:sp>
-      <mc:AlternateContent xmlns:mc="http://schemas.openxmlformats.org/markup-compatibility/2006">
-        <mc:Choice xmlns:a14="http://schemas.microsoft.com/office/drawing/2010/main" Requires="a14">
+      <mc:AlternateContent xmlns:mc="http://schemas.openxmlformats.org/markup-compatibility/2006" xmlns:a14="http://schemas.microsoft.com/office/drawing/2010/main">
+        <mc:Choice Requires="a14">
           <p:sp>
             <p:nvSpPr>
               <p:cNvPr id="6" name="Espaço Reservado para Conteúdo 5">
@@ -16239,7 +16016,7 @@
             </p:txBody>
           </p:sp>
         </mc:Choice>
-        <mc:Fallback>
+        <mc:Fallback xmlns="">
           <p:sp>
             <p:nvSpPr>
               <p:cNvPr id="6" name="Espaço Reservado para Conteúdo 5">
@@ -17304,8 +17081,8 @@
           </a:graphicData>
         </a:graphic>
       </p:graphicFrame>
-      <mc:AlternateContent xmlns:mc="http://schemas.openxmlformats.org/markup-compatibility/2006">
-        <mc:Choice xmlns:a14="http://schemas.microsoft.com/office/drawing/2010/main" Requires="a14">
+      <mc:AlternateContent xmlns:mc="http://schemas.openxmlformats.org/markup-compatibility/2006" xmlns:a14="http://schemas.microsoft.com/office/drawing/2010/main">
+        <mc:Choice Requires="a14">
           <p:sp>
             <p:nvSpPr>
               <p:cNvPr id="4" name="CaixaDeTexto 3">
@@ -17355,6 +17132,7 @@
                 <a:endParaRPr lang="pt-BR" dirty="0"/>
               </a:p>
               <a:p>
+                <a:pPr/>
                 <a14:m>
                   <m:oMathPara xmlns:m="http://schemas.openxmlformats.org/officeDocument/2006/math">
                     <m:oMathParaPr>
@@ -17365,79 +17143,7 @@
                         <a:rPr lang="pt-BR" i="1" dirty="0" smtClean="0">
                           <a:latin typeface="Cambria Math" panose="02040503050406030204" pitchFamily="18" charset="0"/>
                         </a:rPr>
-                        <m:t>0</m:t>
-                      </m:r>
-                      <m:r>
-                        <a:rPr lang="pt-BR" i="1" dirty="0" smtClean="0">
-                          <a:latin typeface="Cambria Math" panose="02040503050406030204" pitchFamily="18" charset="0"/>
-                        </a:rPr>
-                        <m:t>,</m:t>
-                      </m:r>
-                      <m:r>
-                        <a:rPr lang="pt-BR" i="1" dirty="0" smtClean="0">
-                          <a:latin typeface="Cambria Math" panose="02040503050406030204" pitchFamily="18" charset="0"/>
-                        </a:rPr>
-                        <m:t>10</m:t>
-                      </m:r>
-                      <m:r>
-                        <a:rPr lang="pt-BR" i="1" dirty="0" smtClean="0">
-                          <a:latin typeface="Cambria Math" panose="02040503050406030204" pitchFamily="18" charset="0"/>
-                        </a:rPr>
-                        <m:t>→</m:t>
-                      </m:r>
-                      <m:r>
-                        <a:rPr lang="pt-BR" i="1" dirty="0" smtClean="0">
-                          <a:latin typeface="Cambria Math" panose="02040503050406030204" pitchFamily="18" charset="0"/>
-                        </a:rPr>
-                        <m:t>0</m:t>
-                      </m:r>
-                      <m:r>
-                        <a:rPr lang="pt-BR" i="1" dirty="0" smtClean="0">
-                          <a:latin typeface="Cambria Math" panose="02040503050406030204" pitchFamily="18" charset="0"/>
-                        </a:rPr>
-                        <m:t>,</m:t>
-                      </m:r>
-                      <m:r>
-                        <a:rPr lang="pt-BR" i="1" dirty="0" smtClean="0">
-                          <a:latin typeface="Cambria Math" panose="02040503050406030204" pitchFamily="18" charset="0"/>
-                        </a:rPr>
-                        <m:t>30</m:t>
-                      </m:r>
-                      <m:r>
-                        <a:rPr lang="pt-BR" i="1" dirty="0" smtClean="0">
-                          <a:latin typeface="Cambria Math" panose="02040503050406030204" pitchFamily="18" charset="0"/>
-                        </a:rPr>
-                        <m:t>→</m:t>
-                      </m:r>
-                      <m:r>
-                        <a:rPr lang="pt-BR" i="1" dirty="0" smtClean="0">
-                          <a:latin typeface="Cambria Math" panose="02040503050406030204" pitchFamily="18" charset="0"/>
-                        </a:rPr>
-                        <m:t>0</m:t>
-                      </m:r>
-                      <m:r>
-                        <a:rPr lang="pt-BR" i="1" dirty="0" smtClean="0">
-                          <a:latin typeface="Cambria Math" panose="02040503050406030204" pitchFamily="18" charset="0"/>
-                        </a:rPr>
-                        <m:t>,</m:t>
-                      </m:r>
-                      <m:r>
-                        <a:rPr lang="pt-BR" i="1" dirty="0" smtClean="0">
-                          <a:latin typeface="Cambria Math" panose="02040503050406030204" pitchFamily="18" charset="0"/>
-                        </a:rPr>
-                        <m:t>80</m:t>
-                      </m:r>
-                      <m:r>
-                        <a:rPr lang="pt-BR" i="1" dirty="0" smtClean="0">
-                          <a:latin typeface="Cambria Math" panose="02040503050406030204" pitchFamily="18" charset="0"/>
-                        </a:rPr>
-                        <m:t>→</m:t>
-                      </m:r>
-                      <m:r>
-                        <a:rPr lang="pt-BR" i="1" dirty="0" smtClean="0">
-                          <a:latin typeface="Cambria Math" panose="02040503050406030204" pitchFamily="18" charset="0"/>
-                        </a:rPr>
-                        <m:t>1</m:t>
+                        <m:t>0,10→0,30→0,80→1</m:t>
                       </m:r>
                     </m:oMath>
                   </m:oMathPara>
@@ -17457,6 +17163,7 @@
                 <a:endParaRPr lang="pt-BR" dirty="0"/>
               </a:p>
               <a:p>
+                <a:pPr/>
                 <a14:m>
                   <m:oMathPara xmlns:m="http://schemas.openxmlformats.org/officeDocument/2006/math">
                     <m:oMathParaPr>
@@ -17467,43 +17174,7 @@
                         <a:rPr lang="pt-BR" i="1" dirty="0" smtClean="0">
                           <a:latin typeface="Cambria Math" panose="02040503050406030204" pitchFamily="18" charset="0"/>
                         </a:rPr>
-                        <m:t>50</m:t>
-                      </m:r>
-                      <m:r>
-                        <a:rPr lang="pt-BR" i="1" dirty="0" smtClean="0">
-                          <a:latin typeface="Cambria Math" panose="02040503050406030204" pitchFamily="18" charset="0"/>
-                        </a:rPr>
-                        <m:t>&lt;</m:t>
-                      </m:r>
-                      <m:r>
-                        <a:rPr lang="pt-BR" i="1" dirty="0" smtClean="0">
-                          <a:latin typeface="Cambria Math" panose="02040503050406030204" pitchFamily="18" charset="0"/>
-                        </a:rPr>
-                        <m:t>100</m:t>
-                      </m:r>
-                      <m:r>
-                        <a:rPr lang="pt-BR" i="1" dirty="0" smtClean="0">
-                          <a:latin typeface="Cambria Math" panose="02040503050406030204" pitchFamily="18" charset="0"/>
-                        </a:rPr>
-                        <m:t>&lt;</m:t>
-                      </m:r>
-                      <m:r>
-                        <a:rPr lang="pt-BR" i="1" dirty="0" smtClean="0">
-                          <a:latin typeface="Cambria Math" panose="02040503050406030204" pitchFamily="18" charset="0"/>
-                        </a:rPr>
-                        <m:t>150</m:t>
-                      </m:r>
-                      <m:r>
-                        <a:rPr lang="pt-BR" i="1" dirty="0" smtClean="0">
-                          <a:latin typeface="Cambria Math" panose="02040503050406030204" pitchFamily="18" charset="0"/>
-                        </a:rPr>
-                        <m:t>&lt;</m:t>
-                      </m:r>
-                      <m:r>
-                        <a:rPr lang="pt-BR" i="1" dirty="0" smtClean="0">
-                          <a:latin typeface="Cambria Math" panose="02040503050406030204" pitchFamily="18" charset="0"/>
-                        </a:rPr>
-                        <m:t>200</m:t>
+                        <m:t>50&lt;100&lt;150&lt;200</m:t>
                       </m:r>
                     </m:oMath>
                   </m:oMathPara>
@@ -17513,7 +17184,7 @@
             </p:txBody>
           </p:sp>
         </mc:Choice>
-        <mc:Fallback>
+        <mc:Fallback xmlns="">
           <p:sp>
             <p:nvSpPr>
               <p:cNvPr id="4" name="CaixaDeTexto 3">
@@ -17731,8 +17402,8 @@
           </a:p>
         </p:txBody>
       </p:sp>
-      <mc:AlternateContent xmlns:mc="http://schemas.openxmlformats.org/markup-compatibility/2006">
-        <mc:Choice xmlns:a14="http://schemas.microsoft.com/office/drawing/2010/main" Requires="a14">
+      <mc:AlternateContent xmlns:mc="http://schemas.openxmlformats.org/markup-compatibility/2006" xmlns:a14="http://schemas.microsoft.com/office/drawing/2010/main">
+        <mc:Choice Requires="a14">
           <p:sp>
             <p:nvSpPr>
               <p:cNvPr id="6" name="Espaço Reservado para Conteúdo 5">
@@ -17777,229 +17448,7 @@
                       <a:rPr lang="pt-BR" sz="2400" i="1" dirty="0" smtClean="0">
                         <a:latin typeface="Cambria Math" panose="02040503050406030204" pitchFamily="18" charset="0"/>
                       </a:rPr>
-                      <m:t>0</m:t>
-                    </m:r>
-                    <m:r>
-                      <a:rPr lang="pt-BR" sz="2400" i="1" dirty="0" smtClean="0">
-                        <a:latin typeface="Cambria Math" panose="02040503050406030204" pitchFamily="18" charset="0"/>
-                      </a:rPr>
-                      <m:t> </m:t>
-                    </m:r>
-                    <m:r>
-                      <a:rPr lang="pt-BR" sz="2400" i="1" dirty="0" smtClean="0">
-                        <a:latin typeface="Cambria Math" panose="02040503050406030204" pitchFamily="18" charset="0"/>
-                      </a:rPr>
-                      <m:t>0</m:t>
-                    </m:r>
-                    <m:r>
-                      <a:rPr lang="pt-BR" sz="2400" i="1" dirty="0" smtClean="0">
-                        <a:latin typeface="Cambria Math" panose="02040503050406030204" pitchFamily="18" charset="0"/>
-                      </a:rPr>
-                      <m:t> </m:t>
-                    </m:r>
-                    <m:r>
-                      <a:rPr lang="pt-BR" sz="2400" i="1" dirty="0" smtClean="0">
-                        <a:latin typeface="Cambria Math" panose="02040503050406030204" pitchFamily="18" charset="0"/>
-                      </a:rPr>
-                      <m:t>0</m:t>
-                    </m:r>
-                    <m:r>
-                      <a:rPr lang="pt-BR" sz="2400" i="1" dirty="0" smtClean="0">
-                        <a:latin typeface="Cambria Math" panose="02040503050406030204" pitchFamily="18" charset="0"/>
-                      </a:rPr>
-                      <m:t> </m:t>
-                    </m:r>
-                    <m:r>
-                      <a:rPr lang="pt-BR" sz="2400" i="1" dirty="0" smtClean="0">
-                        <a:latin typeface="Cambria Math" panose="02040503050406030204" pitchFamily="18" charset="0"/>
-                      </a:rPr>
-                      <m:t>1</m:t>
-                    </m:r>
-                    <m:r>
-                      <a:rPr lang="pt-BR" sz="2400" i="1" dirty="0" smtClean="0">
-                        <a:latin typeface="Cambria Math" panose="02040503050406030204" pitchFamily="18" charset="0"/>
-                      </a:rPr>
-                      <m:t> </m:t>
-                    </m:r>
-                    <m:r>
-                      <a:rPr lang="pt-BR" sz="2400" i="1" dirty="0" smtClean="0">
-                        <a:latin typeface="Cambria Math" panose="02040503050406030204" pitchFamily="18" charset="0"/>
-                      </a:rPr>
-                      <m:t>1</m:t>
-                    </m:r>
-                    <m:r>
-                      <a:rPr lang="pt-BR" sz="2400" i="1" dirty="0" smtClean="0">
-                        <a:latin typeface="Cambria Math" panose="02040503050406030204" pitchFamily="18" charset="0"/>
-                      </a:rPr>
-                      <m:t> </m:t>
-                    </m:r>
-                    <m:r>
-                      <a:rPr lang="pt-BR" sz="2400" i="1" dirty="0" smtClean="0">
-                        <a:latin typeface="Cambria Math" panose="02040503050406030204" pitchFamily="18" charset="0"/>
-                      </a:rPr>
-                      <m:t>1</m:t>
-                    </m:r>
-                    <m:r>
-                      <a:rPr lang="pt-BR" sz="2400" i="1" dirty="0" smtClean="0">
-                        <a:latin typeface="Cambria Math" panose="02040503050406030204" pitchFamily="18" charset="0"/>
-                      </a:rPr>
-                      <m:t> </m:t>
-                    </m:r>
-                    <m:r>
-                      <a:rPr lang="pt-BR" sz="2400" i="1" dirty="0" smtClean="0">
-                        <a:latin typeface="Cambria Math" panose="02040503050406030204" pitchFamily="18" charset="0"/>
-                      </a:rPr>
-                      <m:t>1</m:t>
-                    </m:r>
-                    <m:r>
-                      <a:rPr lang="pt-BR" sz="2400" i="1" dirty="0" smtClean="0">
-                        <a:latin typeface="Cambria Math" panose="02040503050406030204" pitchFamily="18" charset="0"/>
-                      </a:rPr>
-                      <m:t> </m:t>
-                    </m:r>
-                    <m:r>
-                      <a:rPr lang="pt-BR" sz="2400" i="1" dirty="0" smtClean="0">
-                        <a:latin typeface="Cambria Math" panose="02040503050406030204" pitchFamily="18" charset="0"/>
-                      </a:rPr>
-                      <m:t>1</m:t>
-                    </m:r>
-                    <m:r>
-                      <a:rPr lang="pt-BR" sz="2400" i="1" dirty="0" smtClean="0">
-                        <a:latin typeface="Cambria Math" panose="02040503050406030204" pitchFamily="18" charset="0"/>
-                      </a:rPr>
-                      <m:t> </m:t>
-                    </m:r>
-                    <m:r>
-                      <a:rPr lang="pt-BR" sz="2400" i="1" dirty="0" smtClean="0">
-                        <a:latin typeface="Cambria Math" panose="02040503050406030204" pitchFamily="18" charset="0"/>
-                      </a:rPr>
-                      <m:t>1</m:t>
-                    </m:r>
-                    <m:r>
-                      <a:rPr lang="pt-BR" sz="2400" i="1" dirty="0" smtClean="0">
-                        <a:latin typeface="Cambria Math" panose="02040503050406030204" pitchFamily="18" charset="0"/>
-                      </a:rPr>
-                      <m:t> </m:t>
-                    </m:r>
-                    <m:r>
-                      <a:rPr lang="pt-BR" sz="2400" i="1" dirty="0" smtClean="0">
-                        <a:latin typeface="Cambria Math" panose="02040503050406030204" pitchFamily="18" charset="0"/>
-                      </a:rPr>
-                      <m:t>2</m:t>
-                    </m:r>
-                    <m:r>
-                      <a:rPr lang="pt-BR" sz="2400" i="1" dirty="0" smtClean="0">
-                        <a:latin typeface="Cambria Math" panose="02040503050406030204" pitchFamily="18" charset="0"/>
-                      </a:rPr>
-                      <m:t> </m:t>
-                    </m:r>
-                    <m:r>
-                      <a:rPr lang="pt-BR" sz="2400" i="1" dirty="0" smtClean="0">
-                        <a:latin typeface="Cambria Math" panose="02040503050406030204" pitchFamily="18" charset="0"/>
-                      </a:rPr>
-                      <m:t>2</m:t>
-                    </m:r>
-                    <m:r>
-                      <a:rPr lang="pt-BR" sz="2400" i="1" dirty="0" smtClean="0">
-                        <a:latin typeface="Cambria Math" panose="02040503050406030204" pitchFamily="18" charset="0"/>
-                      </a:rPr>
-                      <m:t> </m:t>
-                    </m:r>
-                    <m:r>
-                      <a:rPr lang="pt-BR" sz="2400" i="1" dirty="0" smtClean="0">
-                        <a:latin typeface="Cambria Math" panose="02040503050406030204" pitchFamily="18" charset="0"/>
-                      </a:rPr>
-                      <m:t>2</m:t>
-                    </m:r>
-                    <m:r>
-                      <a:rPr lang="pt-BR" sz="2400" i="1" dirty="0" smtClean="0">
-                        <a:latin typeface="Cambria Math" panose="02040503050406030204" pitchFamily="18" charset="0"/>
-                      </a:rPr>
-                      <m:t> </m:t>
-                    </m:r>
-                    <m:r>
-                      <a:rPr lang="pt-BR" sz="2400" i="1" dirty="0" smtClean="0">
-                        <a:latin typeface="Cambria Math" panose="02040503050406030204" pitchFamily="18" charset="0"/>
-                      </a:rPr>
-                      <m:t>2</m:t>
-                    </m:r>
-                    <m:r>
-                      <a:rPr lang="pt-BR" sz="2400" i="1" dirty="0" smtClean="0">
-                        <a:latin typeface="Cambria Math" panose="02040503050406030204" pitchFamily="18" charset="0"/>
-                      </a:rPr>
-                      <m:t> </m:t>
-                    </m:r>
-                    <m:r>
-                      <a:rPr lang="pt-BR" sz="2400" i="1" dirty="0" smtClean="0">
-                        <a:latin typeface="Cambria Math" panose="02040503050406030204" pitchFamily="18" charset="0"/>
-                      </a:rPr>
-                      <m:t>2</m:t>
-                    </m:r>
-                    <m:r>
-                      <a:rPr lang="pt-BR" sz="2400" i="1" dirty="0" smtClean="0">
-                        <a:latin typeface="Cambria Math" panose="02040503050406030204" pitchFamily="18" charset="0"/>
-                      </a:rPr>
-                      <m:t> </m:t>
-                    </m:r>
-                    <m:r>
-                      <a:rPr lang="pt-BR" sz="2400" i="1" dirty="0" smtClean="0">
-                        <a:latin typeface="Cambria Math" panose="02040503050406030204" pitchFamily="18" charset="0"/>
-                      </a:rPr>
-                      <m:t>3</m:t>
-                    </m:r>
-                    <m:r>
-                      <a:rPr lang="pt-BR" sz="2400" i="1" dirty="0" smtClean="0">
-                        <a:latin typeface="Cambria Math" panose="02040503050406030204" pitchFamily="18" charset="0"/>
-                      </a:rPr>
-                      <m:t> </m:t>
-                    </m:r>
-                    <m:r>
-                      <a:rPr lang="pt-BR" sz="2400" i="1" dirty="0" smtClean="0">
-                        <a:latin typeface="Cambria Math" panose="02040503050406030204" pitchFamily="18" charset="0"/>
-                      </a:rPr>
-                      <m:t>3</m:t>
-                    </m:r>
-                    <m:r>
-                      <a:rPr lang="pt-BR" sz="2400" i="1" dirty="0" smtClean="0">
-                        <a:latin typeface="Cambria Math" panose="02040503050406030204" pitchFamily="18" charset="0"/>
-                      </a:rPr>
-                      <m:t> </m:t>
-                    </m:r>
-                    <m:r>
-                      <a:rPr lang="pt-BR" sz="2400" i="1" dirty="0" smtClean="0">
-                        <a:latin typeface="Cambria Math" panose="02040503050406030204" pitchFamily="18" charset="0"/>
-                      </a:rPr>
-                      <m:t>3</m:t>
-                    </m:r>
-                    <m:r>
-                      <a:rPr lang="pt-BR" sz="2400" i="1" dirty="0" smtClean="0">
-                        <a:latin typeface="Cambria Math" panose="02040503050406030204" pitchFamily="18" charset="0"/>
-                      </a:rPr>
-                      <m:t> </m:t>
-                    </m:r>
-                    <m:r>
-                      <a:rPr lang="pt-BR" sz="2400" i="1" dirty="0" smtClean="0">
-                        <a:latin typeface="Cambria Math" panose="02040503050406030204" pitchFamily="18" charset="0"/>
-                      </a:rPr>
-                      <m:t>3</m:t>
-                    </m:r>
-                    <m:r>
-                      <a:rPr lang="pt-BR" sz="2400" i="1" dirty="0" smtClean="0">
-                        <a:latin typeface="Cambria Math" panose="02040503050406030204" pitchFamily="18" charset="0"/>
-                      </a:rPr>
-                      <m:t> </m:t>
-                    </m:r>
-                    <m:r>
-                      <a:rPr lang="pt-BR" sz="2400" i="1" dirty="0" smtClean="0">
-                        <a:latin typeface="Cambria Math" panose="02040503050406030204" pitchFamily="18" charset="0"/>
-                      </a:rPr>
-                      <m:t>3</m:t>
-                    </m:r>
-                    <m:r>
-                      <a:rPr lang="pt-BR" sz="2400" i="1" dirty="0" smtClean="0">
-                        <a:latin typeface="Cambria Math" panose="02040503050406030204" pitchFamily="18" charset="0"/>
-                      </a:rPr>
-                      <m:t>…</m:t>
+                      <m:t>0 0 0 1 1 1 1 1 1 2 2 2 2 2 3 3 3 3 3…</m:t>
                     </m:r>
                   </m:oMath>
                 </a14:m>
@@ -18035,43 +17484,7 @@
                       <a:rPr lang="pt-BR" sz="2400" i="1" dirty="0" smtClean="0">
                         <a:latin typeface="Cambria Math" panose="02040503050406030204" pitchFamily="18" charset="0"/>
                       </a:rPr>
-                      <m:t>(</m:t>
-                    </m:r>
-                    <m:r>
-                      <a:rPr lang="pt-BR" sz="2400" i="1" dirty="0" smtClean="0">
-                        <a:latin typeface="Cambria Math" panose="02040503050406030204" pitchFamily="18" charset="0"/>
-                      </a:rPr>
-                      <m:t>150</m:t>
-                    </m:r>
-                    <m:r>
-                      <a:rPr lang="pt-BR" sz="2400" i="1" dirty="0" smtClean="0">
-                        <a:latin typeface="Cambria Math" panose="02040503050406030204" pitchFamily="18" charset="0"/>
-                      </a:rPr>
-                      <m:t>)=</m:t>
-                    </m:r>
-                    <m:r>
-                      <a:rPr lang="pt-BR" sz="2400" i="1" dirty="0" smtClean="0">
-                        <a:latin typeface="Cambria Math" panose="02040503050406030204" pitchFamily="18" charset="0"/>
-                      </a:rPr>
-                      <m:t>0</m:t>
-                    </m:r>
-                    <m:r>
-                      <a:rPr lang="pt-BR" sz="2400" i="1" dirty="0" smtClean="0">
-                        <a:latin typeface="Cambria Math" panose="02040503050406030204" pitchFamily="18" charset="0"/>
-                      </a:rPr>
-                      <m:t>,</m:t>
-                    </m:r>
-                    <m:r>
-                      <a:rPr lang="pt-BR" sz="2400" i="1" dirty="0" smtClean="0">
-                        <a:latin typeface="Cambria Math" panose="02040503050406030204" pitchFamily="18" charset="0"/>
-                      </a:rPr>
-                      <m:t>8</m:t>
-                    </m:r>
-                    <m:r>
-                      <a:rPr lang="pt-BR" sz="2400" i="1" dirty="0" smtClean="0">
-                        <a:latin typeface="Cambria Math" panose="02040503050406030204" pitchFamily="18" charset="0"/>
-                      </a:rPr>
-                      <m:t> </m:t>
+                      <m:t>(150)=0,8 </m:t>
                     </m:r>
                   </m:oMath>
                 </a14:m>
@@ -18102,7 +17515,7 @@
             </p:txBody>
           </p:sp>
         </mc:Choice>
-        <mc:Fallback>
+        <mc:Fallback xmlns="">
           <p:sp>
             <p:nvSpPr>
               <p:cNvPr id="6" name="Espaço Reservado para Conteúdo 5">
@@ -18446,7 +17859,7 @@
                 </a14:m>
                 <a:r>
                   <a:rPr lang="pt-BR" sz="2200" dirty="0"/>
-                  <a:t> número de níveis de cinza da imagem;</a:t>
+                  <a:t> k-ésimo nível de intensidade/cinza.</a:t>
                 </a:r>
               </a:p>
               <a:p>
@@ -22499,40 +21912,59 @@
                       <m:rPr>
                         <m:sty m:val="p"/>
                       </m:rPr>
-                      <a:rPr lang="pt-BR" sz="2400" i="1" baseline="-25000" dirty="0">
+                      <a:rPr lang="pt-BR" sz="2400" i="1" baseline="-25000" dirty="0" smtClean="0">
                         <a:latin typeface="Cambria Math" panose="02040503050406030204" pitchFamily="18" charset="0"/>
                       </a:rPr>
                       <m:t>r</m:t>
                     </m:r>
                     <m:r>
-                      <a:rPr lang="pt-BR" sz="2400" i="1" baseline="-25000" dirty="0">
-                        <a:latin typeface="Cambria Math" panose="02040503050406030204" pitchFamily="18" charset="0"/>
-                      </a:rPr>
-                      <m:t>⁡(</m:t>
-                    </m:r>
-                    <m:r>
-                      <a:rPr lang="pt-BR" sz="2400" i="1" dirty="0" err="1">
-                        <a:latin typeface="Cambria Math" panose="02040503050406030204" pitchFamily="18" charset="0"/>
-                      </a:rPr>
-                      <m:t>𝑟</m:t>
-                    </m:r>
-                    <m:r>
-                      <a:rPr lang="pt-BR" sz="2400" i="1" baseline="-25000" dirty="0" err="1">
-                        <a:latin typeface="Cambria Math" panose="02040503050406030204" pitchFamily="18" charset="0"/>
-                      </a:rPr>
-                      <m:t>𝑘</m:t>
-                    </m:r>
-                    <m:r>
                       <a:rPr lang="pt-BR" sz="2400" i="1" dirty="0">
                         <a:latin typeface="Cambria Math" panose="02040503050406030204" pitchFamily="18" charset="0"/>
                       </a:rPr>
-                      <m:t>) </m:t>
+                      <m:t> </m:t>
+                    </m:r>
+                    <m:r>
+                      <a:rPr lang="pt-BR" sz="2400" b="0" i="1" dirty="0" smtClean="0">
+                        <a:latin typeface="Cambria Math" panose="02040503050406030204" pitchFamily="18" charset="0"/>
+                      </a:rPr>
+                      <m:t>(</m:t>
+                    </m:r>
+                    <m:sSub>
+                      <m:sSubPr>
+                        <m:ctrlPr>
+                          <a:rPr lang="pt-BR" sz="2400" b="0" i="1" dirty="0" smtClean="0">
+                            <a:latin typeface="Cambria Math" panose="02040503050406030204" pitchFamily="18" charset="0"/>
+                          </a:rPr>
+                        </m:ctrlPr>
+                      </m:sSubPr>
+                      <m:e>
+                        <m:r>
+                          <a:rPr lang="pt-BR" sz="2400" b="0" i="1" dirty="0" smtClean="0">
+                            <a:latin typeface="Cambria Math" panose="02040503050406030204" pitchFamily="18" charset="0"/>
+                          </a:rPr>
+                          <m:t>𝑟</m:t>
+                        </m:r>
+                      </m:e>
+                      <m:sub>
+                        <m:r>
+                          <a:rPr lang="pt-BR" sz="2400" b="0" i="1" dirty="0" smtClean="0">
+                            <a:latin typeface="Cambria Math" panose="02040503050406030204" pitchFamily="18" charset="0"/>
+                          </a:rPr>
+                          <m:t>𝑘</m:t>
+                        </m:r>
+                      </m:sub>
+                    </m:sSub>
+                    <m:r>
+                      <a:rPr lang="pt-BR" sz="2400" b="0" i="1" dirty="0" smtClean="0">
+                        <a:latin typeface="Cambria Math" panose="02040503050406030204" pitchFamily="18" charset="0"/>
+                      </a:rPr>
+                      <m:t>)</m:t>
                     </m:r>
                   </m:oMath>
                 </a14:m>
                 <a:r>
                   <a:rPr lang="pt-BR" sz="2400" dirty="0"/>
-                  <a:t>dá uma estimativa da probabilidade de ocorrência do nível de cinza na imagem.</a:t>
+                  <a:t> dá uma estimativa da probabilidade de ocorrência do nível de cinza na imagem.</a:t>
                 </a:r>
               </a:p>
               <a:p>

--- a/UNIUBE-PDI/Slides/04 - Histograma e Equalizacao.pptx
+++ b/UNIUBE-PDI/Slides/04 - Histograma e Equalizacao.pptx
@@ -1886,7 +1886,7 @@
           <a:p>
             <a:fld id="{6ED03497-8374-466E-85FA-95E1138D8F6E}" type="datetimeFigureOut">
               <a:rPr lang="pt-BR" smtClean="0"/>
-              <a:t>01/09/2026</a:t>
+              <a:t>03/09/2026</a:t>
             </a:fld>
             <a:endParaRPr lang="pt-BR"/>
           </a:p>
@@ -4865,7 +4865,7 @@
           <a:p>
             <a:fld id="{A87E3B6E-8316-4A1C-BADA-DB7F3456EEF1}" type="datetimeFigureOut">
               <a:rPr lang="pt-BR" smtClean="0"/>
-              <a:t>01/09/2026</a:t>
+              <a:t>03/09/2026</a:t>
             </a:fld>
             <a:endParaRPr lang="pt-BR"/>
           </a:p>
@@ -5063,7 +5063,7 @@
           <a:p>
             <a:fld id="{A87E3B6E-8316-4A1C-BADA-DB7F3456EEF1}" type="datetimeFigureOut">
               <a:rPr lang="pt-BR" smtClean="0"/>
-              <a:t>01/09/2026</a:t>
+              <a:t>03/09/2026</a:t>
             </a:fld>
             <a:endParaRPr lang="pt-BR"/>
           </a:p>
@@ -5271,7 +5271,7 @@
           <a:p>
             <a:fld id="{A87E3B6E-8316-4A1C-BADA-DB7F3456EEF1}" type="datetimeFigureOut">
               <a:rPr lang="pt-BR" smtClean="0"/>
-              <a:t>01/09/2026</a:t>
+              <a:t>03/09/2026</a:t>
             </a:fld>
             <a:endParaRPr lang="pt-BR"/>
           </a:p>
@@ -5507,7 +5507,7 @@
           <a:p>
             <a:fld id="{A87E3B6E-8316-4A1C-BADA-DB7F3456EEF1}" type="datetimeFigureOut">
               <a:rPr lang="pt-BR" smtClean="0"/>
-              <a:t>01/09/2026</a:t>
+              <a:t>03/09/2026</a:t>
             </a:fld>
             <a:endParaRPr lang="pt-BR"/>
           </a:p>
@@ -5677,7 +5677,7 @@
           <a:p>
             <a:fld id="{A87E3B6E-8316-4A1C-BADA-DB7F3456EEF1}" type="datetimeFigureOut">
               <a:rPr lang="pt-BR" smtClean="0"/>
-              <a:t>01/09/2026</a:t>
+              <a:t>03/09/2026</a:t>
             </a:fld>
             <a:endParaRPr lang="pt-BR"/>
           </a:p>
@@ -5945,7 +5945,7 @@
           <a:p>
             <a:fld id="{A87E3B6E-8316-4A1C-BADA-DB7F3456EEF1}" type="datetimeFigureOut">
               <a:rPr lang="pt-BR" smtClean="0"/>
-              <a:t>01/09/2026</a:t>
+              <a:t>03/09/2026</a:t>
             </a:fld>
             <a:endParaRPr lang="pt-BR"/>
           </a:p>
@@ -6177,7 +6177,7 @@
           <a:p>
             <a:fld id="{A87E3B6E-8316-4A1C-BADA-DB7F3456EEF1}" type="datetimeFigureOut">
               <a:rPr lang="pt-BR" smtClean="0"/>
-              <a:t>01/09/2026</a:t>
+              <a:t>03/09/2026</a:t>
             </a:fld>
             <a:endParaRPr lang="pt-BR"/>
           </a:p>
@@ -6532,7 +6532,7 @@
           <a:p>
             <a:fld id="{A87E3B6E-8316-4A1C-BADA-DB7F3456EEF1}" type="datetimeFigureOut">
               <a:rPr lang="pt-BR" smtClean="0"/>
-              <a:t>01/09/2026</a:t>
+              <a:t>03/09/2026</a:t>
             </a:fld>
             <a:endParaRPr lang="pt-BR"/>
           </a:p>
@@ -6673,7 +6673,7 @@
           <a:p>
             <a:fld id="{A87E3B6E-8316-4A1C-BADA-DB7F3456EEF1}" type="datetimeFigureOut">
               <a:rPr lang="pt-BR" smtClean="0"/>
-              <a:t>01/09/2026</a:t>
+              <a:t>03/09/2026</a:t>
             </a:fld>
             <a:endParaRPr lang="pt-BR"/>
           </a:p>
@@ -6768,7 +6768,7 @@
           <a:p>
             <a:fld id="{A87E3B6E-8316-4A1C-BADA-DB7F3456EEF1}" type="datetimeFigureOut">
               <a:rPr lang="pt-BR" smtClean="0"/>
-              <a:t>01/09/2026</a:t>
+              <a:t>03/09/2026</a:t>
             </a:fld>
             <a:endParaRPr lang="pt-BR"/>
           </a:p>
@@ -7132,7 +7132,7 @@
           <a:p>
             <a:fld id="{A87E3B6E-8316-4A1C-BADA-DB7F3456EEF1}" type="datetimeFigureOut">
               <a:rPr lang="pt-BR" smtClean="0"/>
-              <a:t>01/09/2026</a:t>
+              <a:t>03/09/2026</a:t>
             </a:fld>
             <a:endParaRPr lang="pt-BR"/>
           </a:p>
@@ -7333,7 +7333,7 @@
           <a:p>
             <a:fld id="{A87E3B6E-8316-4A1C-BADA-DB7F3456EEF1}" type="datetimeFigureOut">
               <a:rPr lang="pt-BR" smtClean="0"/>
-              <a:t>01/09/2026</a:t>
+              <a:t>03/09/2026</a:t>
             </a:fld>
             <a:endParaRPr lang="pt-BR"/>
           </a:p>
@@ -7693,7 +7693,7 @@
           <a:p>
             <a:fld id="{A87E3B6E-8316-4A1C-BADA-DB7F3456EEF1}" type="datetimeFigureOut">
               <a:rPr lang="pt-BR" smtClean="0"/>
-              <a:t>01/09/2026</a:t>
+              <a:t>03/09/2026</a:t>
             </a:fld>
             <a:endParaRPr lang="pt-BR"/>
           </a:p>
@@ -7878,7 +7878,7 @@
           <a:p>
             <a:fld id="{A87E3B6E-8316-4A1C-BADA-DB7F3456EEF1}" type="datetimeFigureOut">
               <a:rPr lang="pt-BR" smtClean="0"/>
-              <a:t>01/09/2026</a:t>
+              <a:t>03/09/2026</a:t>
             </a:fld>
             <a:endParaRPr lang="pt-BR"/>
           </a:p>
@@ -8058,7 +8058,7 @@
           <a:p>
             <a:fld id="{A87E3B6E-8316-4A1C-BADA-DB7F3456EEF1}" type="datetimeFigureOut">
               <a:rPr lang="pt-BR" smtClean="0"/>
-              <a:t>01/09/2026</a:t>
+              <a:t>03/09/2026</a:t>
             </a:fld>
             <a:endParaRPr lang="pt-BR"/>
           </a:p>
@@ -8321,7 +8321,7 @@
           <a:p>
             <a:fld id="{A87E3B6E-8316-4A1C-BADA-DB7F3456EEF1}" type="datetimeFigureOut">
               <a:rPr lang="pt-BR" smtClean="0"/>
-              <a:t>01/09/2026</a:t>
+              <a:t>03/09/2026</a:t>
             </a:fld>
             <a:endParaRPr lang="pt-BR"/>
           </a:p>
@@ -8586,7 +8586,7 @@
           <a:p>
             <a:fld id="{A87E3B6E-8316-4A1C-BADA-DB7F3456EEF1}" type="datetimeFigureOut">
               <a:rPr lang="pt-BR" smtClean="0"/>
-              <a:t>01/09/2026</a:t>
+              <a:t>03/09/2026</a:t>
             </a:fld>
             <a:endParaRPr lang="pt-BR"/>
           </a:p>
@@ -8998,7 +8998,7 @@
           <a:p>
             <a:fld id="{A87E3B6E-8316-4A1C-BADA-DB7F3456EEF1}" type="datetimeFigureOut">
               <a:rPr lang="pt-BR" smtClean="0"/>
-              <a:t>01/09/2026</a:t>
+              <a:t>03/09/2026</a:t>
             </a:fld>
             <a:endParaRPr lang="pt-BR"/>
           </a:p>
@@ -9139,7 +9139,7 @@
           <a:p>
             <a:fld id="{A87E3B6E-8316-4A1C-BADA-DB7F3456EEF1}" type="datetimeFigureOut">
               <a:rPr lang="pt-BR" smtClean="0"/>
-              <a:t>01/09/2026</a:t>
+              <a:t>03/09/2026</a:t>
             </a:fld>
             <a:endParaRPr lang="pt-BR"/>
           </a:p>
@@ -9252,7 +9252,7 @@
           <a:p>
             <a:fld id="{A87E3B6E-8316-4A1C-BADA-DB7F3456EEF1}" type="datetimeFigureOut">
               <a:rPr lang="pt-BR" smtClean="0"/>
-              <a:t>01/09/2026</a:t>
+              <a:t>03/09/2026</a:t>
             </a:fld>
             <a:endParaRPr lang="pt-BR"/>
           </a:p>
@@ -9563,7 +9563,7 @@
           <a:p>
             <a:fld id="{A87E3B6E-8316-4A1C-BADA-DB7F3456EEF1}" type="datetimeFigureOut">
               <a:rPr lang="pt-BR" smtClean="0"/>
-              <a:t>01/09/2026</a:t>
+              <a:t>03/09/2026</a:t>
             </a:fld>
             <a:endParaRPr lang="pt-BR"/>
           </a:p>
@@ -9851,7 +9851,7 @@
           <a:p>
             <a:fld id="{A87E3B6E-8316-4A1C-BADA-DB7F3456EEF1}" type="datetimeFigureOut">
               <a:rPr lang="pt-BR" smtClean="0"/>
-              <a:t>01/09/2026</a:t>
+              <a:t>03/09/2026</a:t>
             </a:fld>
             <a:endParaRPr lang="pt-BR"/>
           </a:p>
@@ -10092,7 +10092,7 @@
           <a:p>
             <a:fld id="{A87E3B6E-8316-4A1C-BADA-DB7F3456EEF1}" type="datetimeFigureOut">
               <a:rPr lang="pt-BR" smtClean="0"/>
-              <a:t>01/09/2026</a:t>
+              <a:t>03/09/2026</a:t>
             </a:fld>
             <a:endParaRPr lang="pt-BR"/>
           </a:p>
@@ -10656,7 +10656,7 @@
           <a:p>
             <a:fld id="{A87E3B6E-8316-4A1C-BADA-DB7F3456EEF1}" type="datetimeFigureOut">
               <a:rPr lang="pt-BR" smtClean="0"/>
-              <a:t>01/09/2026</a:t>
+              <a:t>03/09/2026</a:t>
             </a:fld>
             <a:endParaRPr lang="pt-BR"/>
           </a:p>
@@ -11475,8 +11475,8 @@
           </a:p>
         </p:txBody>
       </p:sp>
-      <mc:AlternateContent xmlns:mc="http://schemas.openxmlformats.org/markup-compatibility/2006" xmlns:a14="http://schemas.microsoft.com/office/drawing/2010/main">
-        <mc:Choice Requires="a14">
+      <mc:AlternateContent xmlns:mc="http://schemas.openxmlformats.org/markup-compatibility/2006">
+        <mc:Choice xmlns:a14="http://schemas.microsoft.com/office/drawing/2010/main" Requires="a14">
           <p:sp>
             <p:nvSpPr>
               <p:cNvPr id="9" name="Espaço Reservado para Conteúdo 5">
@@ -11712,22 +11712,13 @@
                       <m:rPr>
                         <m:sty m:val="p"/>
                       </m:rPr>
-                      <a:rPr lang="pt-BR" sz="2200" i="1" dirty="0" smtClean="0">
+                      <a:rPr lang="pt-BR" sz="2200" i="0" dirty="0" smtClean="0">
                         <a:latin typeface="Cambria Math" panose="02040503050406030204" pitchFamily="18" charset="0"/>
                       </a:rPr>
-                      <m:t>P</m:t>
+                      <m:t>Pr</m:t>
                     </m:r>
                     <m:r>
-                      <m:rPr>
-                        <m:sty m:val="p"/>
-                      </m:rPr>
-                      <a:rPr lang="pt-BR" sz="2200" i="1" baseline="-25000" dirty="0">
-                        <a:latin typeface="Cambria Math" panose="02040503050406030204" pitchFamily="18" charset="0"/>
-                      </a:rPr>
-                      <m:t>r</m:t>
-                    </m:r>
-                    <m:r>
-                      <a:rPr lang="pt-BR" sz="2200" i="1" baseline="-25000" dirty="0">
+                      <a:rPr lang="pt-BR" sz="2200" b="0" i="1" dirty="0" smtClean="0">
                         <a:latin typeface="Cambria Math" panose="02040503050406030204" pitchFamily="18" charset="0"/>
                       </a:rPr>
                       <m:t>⁡(0)</m:t>
@@ -11749,31 +11740,22 @@
                       <m:rPr>
                         <m:sty m:val="p"/>
                       </m:rPr>
-                      <a:rPr lang="pt-BR" sz="2200" i="1" dirty="0" smtClean="0">
+                      <a:rPr lang="pt-BR" sz="2200" i="0" dirty="0" smtClean="0">
                         <a:latin typeface="Cambria Math" panose="02040503050406030204" pitchFamily="18" charset="0"/>
                       </a:rPr>
-                      <m:t>P</m:t>
+                      <m:t>Pr</m:t>
                     </m:r>
                     <m:r>
-                      <m:rPr>
-                        <m:sty m:val="p"/>
-                      </m:rPr>
-                      <a:rPr lang="pt-BR" sz="2200" i="1" baseline="-25000" dirty="0">
+                      <a:rPr lang="pt-BR" sz="2200" b="0" i="1" dirty="0" smtClean="0">
                         <a:latin typeface="Cambria Math" panose="02040503050406030204" pitchFamily="18" charset="0"/>
                       </a:rPr>
-                      <m:t>r</m:t>
-                    </m:r>
-                    <m:r>
-                      <a:rPr lang="pt-BR" sz="2200" i="1" baseline="-25000" dirty="0">
-                        <a:latin typeface="Cambria Math" panose="02040503050406030204" pitchFamily="18" charset="0"/>
-                      </a:rPr>
-                      <m:t>⁡(1/</m:t>
+                      <m:t>⁡(1)</m:t>
                     </m:r>
                     <m:r>
                       <a:rPr lang="pt-BR" sz="2200" i="1" dirty="0">
                         <a:latin typeface="Cambria Math" panose="02040503050406030204" pitchFamily="18" charset="0"/>
                       </a:rPr>
-                      <m:t>7)= 3214/16.384 = 0,196</m:t>
+                      <m:t>= 3214/16.384 = 0,196</m:t>
                     </m:r>
                   </m:oMath>
                 </a14:m>
@@ -11798,7 +11780,7 @@
             </p:txBody>
           </p:sp>
         </mc:Choice>
-        <mc:Fallback xmlns="">
+        <mc:Fallback>
           <p:sp>
             <p:nvSpPr>
               <p:cNvPr id="9" name="Espaço Reservado para Conteúdo 5">
@@ -11843,36 +11825,6 @@
           </p:sp>
         </mc:Fallback>
       </mc:AlternateContent>
-      <p:pic>
-        <p:nvPicPr>
-          <p:cNvPr id="3" name="table">
-            <a:extLst>
-              <a:ext uri="{FF2B5EF4-FFF2-40B4-BE49-F238E27FC236}">
-                <a16:creationId xmlns:a16="http://schemas.microsoft.com/office/drawing/2014/main" id="{8F1B75FB-5F86-0850-85C9-20B3101BDB43}"/>
-              </a:ext>
-            </a:extLst>
-          </p:cNvPr>
-          <p:cNvPicPr>
-            <a:picLocks noChangeAspect="1"/>
-          </p:cNvPicPr>
-          <p:nvPr/>
-        </p:nvPicPr>
-        <p:blipFill>
-          <a:blip r:embed="rId4"/>
-          <a:stretch>
-            <a:fillRect/>
-          </a:stretch>
-        </p:blipFill>
-        <p:spPr>
-          <a:xfrm>
-            <a:off x="6979703" y="2895598"/>
-            <a:ext cx="3960440" cy="3962402"/>
-          </a:xfrm>
-          <a:prstGeom prst="rect">
-            <a:avLst/>
-          </a:prstGeom>
-        </p:spPr>
-      </p:pic>
       <p:sp>
         <p:nvSpPr>
           <p:cNvPr id="4" name="Espaço Reservado para Conteúdo 5">
@@ -12100,6 +12052,468 @@
           </a:p>
         </p:txBody>
       </p:sp>
+      <p:graphicFrame>
+        <p:nvGraphicFramePr>
+          <p:cNvPr id="7" name="Tabela 6">
+            <a:extLst>
+              <a:ext uri="{FF2B5EF4-FFF2-40B4-BE49-F238E27FC236}">
+                <a16:creationId xmlns:a16="http://schemas.microsoft.com/office/drawing/2014/main" id="{65406069-8BA5-281E-BA46-A011F6BEA31B}"/>
+              </a:ext>
+            </a:extLst>
+          </p:cNvPr>
+          <p:cNvGraphicFramePr>
+            <a:graphicFrameLocks noGrp="1"/>
+          </p:cNvGraphicFramePr>
+          <p:nvPr>
+            <p:extLst>
+              <p:ext uri="{D42A27DB-BD31-4B8C-83A1-F6EECF244321}">
+                <p14:modId xmlns:p14="http://schemas.microsoft.com/office/powerpoint/2010/main" val="2735311262"/>
+              </p:ext>
+            </p:extLst>
+          </p:nvPr>
+        </p:nvGraphicFramePr>
+        <p:xfrm>
+          <a:off x="7147986" y="3010505"/>
+          <a:ext cx="4194627" cy="3245543"/>
+        </p:xfrm>
+        <a:graphic>
+          <a:graphicData uri="http://schemas.openxmlformats.org/drawingml/2006/table">
+            <a:tbl>
+              <a:tblPr firstRow="1" bandRow="1">
+                <a:tableStyleId>{5C22544A-7EE6-4342-B048-85BDC9FD1C3A}</a:tableStyleId>
+              </a:tblPr>
+              <a:tblGrid>
+                <a:gridCol w="1398209">
+                  <a:extLst>
+                    <a:ext uri="{9D8B030D-6E8A-4147-A177-3AD203B41FA5}">
+                      <a16:colId xmlns:a16="http://schemas.microsoft.com/office/drawing/2014/main" val="2957138849"/>
+                    </a:ext>
+                  </a:extLst>
+                </a:gridCol>
+                <a:gridCol w="1398209">
+                  <a:extLst>
+                    <a:ext uri="{9D8B030D-6E8A-4147-A177-3AD203B41FA5}">
+                      <a16:colId xmlns:a16="http://schemas.microsoft.com/office/drawing/2014/main" val="212157280"/>
+                    </a:ext>
+                  </a:extLst>
+                </a:gridCol>
+                <a:gridCol w="1398209">
+                  <a:extLst>
+                    <a:ext uri="{9D8B030D-6E8A-4147-A177-3AD203B41FA5}">
+                      <a16:colId xmlns:a16="http://schemas.microsoft.com/office/drawing/2014/main" val="1129723749"/>
+                    </a:ext>
+                  </a:extLst>
+                </a:gridCol>
+              </a:tblGrid>
+              <a:tr h="499892">
+                <a:tc>
+                  <a:txBody>
+                    <a:bodyPr/>
+                    <a:lstStyle/>
+                    <a:p>
+                      <a:pPr algn="ctr"/>
+                      <a:r>
+                        <a:rPr lang="pt-BR" dirty="0" err="1"/>
+                        <a:t>Nivel</a:t>
+                      </a:r>
+                      <a:r>
+                        <a:rPr lang="pt-BR" dirty="0"/>
+                        <a:t> de Cinza (k)</a:t>
+                      </a:r>
+                    </a:p>
+                  </a:txBody>
+                  <a:tcPr/>
+                </a:tc>
+                <a:tc>
+                  <a:txBody>
+                    <a:bodyPr/>
+                    <a:lstStyle/>
+                    <a:p>
+                      <a:pPr algn="ctr"/>
+                      <a:r>
+                        <a:rPr lang="pt-BR" dirty="0" err="1"/>
+                        <a:t>nk</a:t>
+                      </a:r>
+                      <a:endParaRPr lang="pt-BR" dirty="0"/>
+                    </a:p>
+                  </a:txBody>
+                  <a:tcPr/>
+                </a:tc>
+                <a:tc>
+                  <a:txBody>
+                    <a:bodyPr/>
+                    <a:lstStyle/>
+                    <a:p>
+                      <a:pPr algn="ctr"/>
+                      <a:r>
+                        <a:rPr lang="pt-BR" dirty="0"/>
+                        <a:t>Pr(</a:t>
+                      </a:r>
+                      <a:r>
+                        <a:rPr lang="pt-BR" dirty="0" err="1"/>
+                        <a:t>rk</a:t>
+                      </a:r>
+                      <a:r>
+                        <a:rPr lang="pt-BR" dirty="0"/>
+                        <a:t>)</a:t>
+                      </a:r>
+                    </a:p>
+                  </a:txBody>
+                  <a:tcPr/>
+                </a:tc>
+                <a:extLst>
+                  <a:ext uri="{0D108BD9-81ED-4DB2-BD59-A6C34878D82A}">
+                    <a16:rowId xmlns:a16="http://schemas.microsoft.com/office/drawing/2014/main" val="4292120702"/>
+                  </a:ext>
+                </a:extLst>
+              </a:tr>
+              <a:tr h="372209">
+                <a:tc>
+                  <a:txBody>
+                    <a:bodyPr/>
+                    <a:lstStyle/>
+                    <a:p>
+                      <a:pPr algn="ctr"/>
+                      <a:r>
+                        <a:rPr lang="pt-BR" dirty="0"/>
+                        <a:t>0</a:t>
+                      </a:r>
+                    </a:p>
+                  </a:txBody>
+                  <a:tcPr/>
+                </a:tc>
+                <a:tc>
+                  <a:txBody>
+                    <a:bodyPr/>
+                    <a:lstStyle/>
+                    <a:p>
+                      <a:pPr algn="ctr"/>
+                      <a:r>
+                        <a:rPr lang="pt-BR" dirty="0"/>
+                        <a:t>1120</a:t>
+                      </a:r>
+                    </a:p>
+                  </a:txBody>
+                  <a:tcPr/>
+                </a:tc>
+                <a:tc>
+                  <a:txBody>
+                    <a:bodyPr/>
+                    <a:lstStyle/>
+                    <a:p>
+                      <a:pPr algn="ctr"/>
+                      <a:r>
+                        <a:rPr lang="pt-BR" dirty="0"/>
+                        <a:t>0.068</a:t>
+                      </a:r>
+                    </a:p>
+                  </a:txBody>
+                  <a:tcPr/>
+                </a:tc>
+                <a:extLst>
+                  <a:ext uri="{0D108BD9-81ED-4DB2-BD59-A6C34878D82A}">
+                    <a16:rowId xmlns:a16="http://schemas.microsoft.com/office/drawing/2014/main" val="158392531"/>
+                  </a:ext>
+                </a:extLst>
+              </a:tr>
+              <a:tr h="372209">
+                <a:tc>
+                  <a:txBody>
+                    <a:bodyPr/>
+                    <a:lstStyle/>
+                    <a:p>
+                      <a:pPr algn="ctr"/>
+                      <a:r>
+                        <a:rPr lang="pt-BR" dirty="0"/>
+                        <a:t>1</a:t>
+                      </a:r>
+                    </a:p>
+                  </a:txBody>
+                  <a:tcPr/>
+                </a:tc>
+                <a:tc>
+                  <a:txBody>
+                    <a:bodyPr/>
+                    <a:lstStyle/>
+                    <a:p>
+                      <a:pPr algn="ctr"/>
+                      <a:r>
+                        <a:rPr lang="pt-BR" dirty="0"/>
+                        <a:t>3214</a:t>
+                      </a:r>
+                    </a:p>
+                  </a:txBody>
+                  <a:tcPr/>
+                </a:tc>
+                <a:tc>
+                  <a:txBody>
+                    <a:bodyPr/>
+                    <a:lstStyle/>
+                    <a:p>
+                      <a:pPr algn="ctr"/>
+                      <a:r>
+                        <a:rPr lang="pt-BR" dirty="0"/>
+                        <a:t>0.196</a:t>
+                      </a:r>
+                    </a:p>
+                  </a:txBody>
+                  <a:tcPr/>
+                </a:tc>
+                <a:extLst>
+                  <a:ext uri="{0D108BD9-81ED-4DB2-BD59-A6C34878D82A}">
+                    <a16:rowId xmlns:a16="http://schemas.microsoft.com/office/drawing/2014/main" val="4039937308"/>
+                  </a:ext>
+                </a:extLst>
+              </a:tr>
+              <a:tr h="372209">
+                <a:tc>
+                  <a:txBody>
+                    <a:bodyPr/>
+                    <a:lstStyle/>
+                    <a:p>
+                      <a:pPr algn="ctr"/>
+                      <a:r>
+                        <a:rPr lang="pt-BR" dirty="0"/>
+                        <a:t>2</a:t>
+                      </a:r>
+                    </a:p>
+                  </a:txBody>
+                  <a:tcPr/>
+                </a:tc>
+                <a:tc>
+                  <a:txBody>
+                    <a:bodyPr/>
+                    <a:lstStyle/>
+                    <a:p>
+                      <a:pPr algn="ctr"/>
+                      <a:r>
+                        <a:rPr lang="pt-BR" dirty="0"/>
+                        <a:t>4850</a:t>
+                      </a:r>
+                    </a:p>
+                  </a:txBody>
+                  <a:tcPr/>
+                </a:tc>
+                <a:tc>
+                  <a:txBody>
+                    <a:bodyPr/>
+                    <a:lstStyle/>
+                    <a:p>
+                      <a:pPr algn="ctr"/>
+                      <a:r>
+                        <a:rPr lang="pt-BR" dirty="0"/>
+                        <a:t>0.296</a:t>
+                      </a:r>
+                    </a:p>
+                  </a:txBody>
+                  <a:tcPr/>
+                </a:tc>
+                <a:extLst>
+                  <a:ext uri="{0D108BD9-81ED-4DB2-BD59-A6C34878D82A}">
+                    <a16:rowId xmlns:a16="http://schemas.microsoft.com/office/drawing/2014/main" val="377922872"/>
+                  </a:ext>
+                </a:extLst>
+              </a:tr>
+              <a:tr h="372209">
+                <a:tc>
+                  <a:txBody>
+                    <a:bodyPr/>
+                    <a:lstStyle/>
+                    <a:p>
+                      <a:pPr algn="ctr"/>
+                      <a:r>
+                        <a:rPr lang="pt-BR" dirty="0"/>
+                        <a:t>3</a:t>
+                      </a:r>
+                    </a:p>
+                  </a:txBody>
+                  <a:tcPr/>
+                </a:tc>
+                <a:tc>
+                  <a:txBody>
+                    <a:bodyPr/>
+                    <a:lstStyle/>
+                    <a:p>
+                      <a:pPr algn="ctr"/>
+                      <a:r>
+                        <a:rPr lang="pt-BR" dirty="0"/>
+                        <a:t>3425</a:t>
+                      </a:r>
+                    </a:p>
+                  </a:txBody>
+                  <a:tcPr/>
+                </a:tc>
+                <a:tc>
+                  <a:txBody>
+                    <a:bodyPr/>
+                    <a:lstStyle/>
+                    <a:p>
+                      <a:pPr algn="ctr"/>
+                      <a:r>
+                        <a:rPr lang="pt-BR" dirty="0"/>
+                        <a:t>0.209</a:t>
+                      </a:r>
+                    </a:p>
+                  </a:txBody>
+                  <a:tcPr/>
+                </a:tc>
+                <a:extLst>
+                  <a:ext uri="{0D108BD9-81ED-4DB2-BD59-A6C34878D82A}">
+                    <a16:rowId xmlns:a16="http://schemas.microsoft.com/office/drawing/2014/main" val="4059177142"/>
+                  </a:ext>
+                </a:extLst>
+              </a:tr>
+              <a:tr h="372209">
+                <a:tc>
+                  <a:txBody>
+                    <a:bodyPr/>
+                    <a:lstStyle/>
+                    <a:p>
+                      <a:pPr algn="ctr"/>
+                      <a:r>
+                        <a:rPr lang="pt-BR" dirty="0"/>
+                        <a:t>4</a:t>
+                      </a:r>
+                    </a:p>
+                  </a:txBody>
+                  <a:tcPr/>
+                </a:tc>
+                <a:tc>
+                  <a:txBody>
+                    <a:bodyPr/>
+                    <a:lstStyle/>
+                    <a:p>
+                      <a:pPr algn="ctr"/>
+                      <a:r>
+                        <a:rPr lang="pt-BR" dirty="0"/>
+                        <a:t>1995</a:t>
+                      </a:r>
+                    </a:p>
+                  </a:txBody>
+                  <a:tcPr/>
+                </a:tc>
+                <a:tc>
+                  <a:txBody>
+                    <a:bodyPr/>
+                    <a:lstStyle/>
+                    <a:p>
+                      <a:pPr algn="ctr"/>
+                      <a:r>
+                        <a:rPr lang="pt-BR" dirty="0"/>
+                        <a:t>0.122</a:t>
+                      </a:r>
+                    </a:p>
+                  </a:txBody>
+                  <a:tcPr/>
+                </a:tc>
+                <a:extLst>
+                  <a:ext uri="{0D108BD9-81ED-4DB2-BD59-A6C34878D82A}">
+                    <a16:rowId xmlns:a16="http://schemas.microsoft.com/office/drawing/2014/main" val="3737399135"/>
+                  </a:ext>
+                </a:extLst>
+              </a:tr>
+              <a:tr h="372209">
+                <a:tc>
+                  <a:txBody>
+                    <a:bodyPr/>
+                    <a:lstStyle/>
+                    <a:p>
+                      <a:pPr algn="ctr"/>
+                      <a:r>
+                        <a:rPr lang="pt-BR" dirty="0"/>
+                        <a:t>5</a:t>
+                      </a:r>
+                    </a:p>
+                  </a:txBody>
+                  <a:tcPr/>
+                </a:tc>
+                <a:tc>
+                  <a:txBody>
+                    <a:bodyPr/>
+                    <a:lstStyle/>
+                    <a:p>
+                      <a:pPr algn="ctr"/>
+                      <a:r>
+                        <a:rPr lang="pt-BR" dirty="0"/>
+                        <a:t>784</a:t>
+                      </a:r>
+                    </a:p>
+                  </a:txBody>
+                  <a:tcPr/>
+                </a:tc>
+                <a:tc>
+                  <a:txBody>
+                    <a:bodyPr/>
+                    <a:lstStyle/>
+                    <a:p>
+                      <a:pPr algn="ctr"/>
+                      <a:r>
+                        <a:rPr lang="pt-BR" dirty="0"/>
+                        <a:t>0.048</a:t>
+                      </a:r>
+                    </a:p>
+                  </a:txBody>
+                  <a:tcPr/>
+                </a:tc>
+                <a:extLst>
+                  <a:ext uri="{0D108BD9-81ED-4DB2-BD59-A6C34878D82A}">
+                    <a16:rowId xmlns:a16="http://schemas.microsoft.com/office/drawing/2014/main" val="2548375061"/>
+                  </a:ext>
+                </a:extLst>
+              </a:tr>
+              <a:tr h="372209">
+                <a:tc>
+                  <a:txBody>
+                    <a:bodyPr/>
+                    <a:lstStyle/>
+                    <a:p>
+                      <a:pPr algn="ctr"/>
+                      <a:r>
+                        <a:rPr lang="pt-BR" dirty="0"/>
+                        <a:t>6</a:t>
+                      </a:r>
+                    </a:p>
+                  </a:txBody>
+                  <a:tcPr/>
+                </a:tc>
+                <a:tc>
+                  <a:txBody>
+                    <a:bodyPr/>
+                    <a:lstStyle/>
+                    <a:p>
+                      <a:pPr algn="ctr"/>
+                      <a:r>
+                        <a:rPr lang="pt-BR" dirty="0"/>
+                        <a:t>541</a:t>
+                      </a:r>
+                    </a:p>
+                  </a:txBody>
+                  <a:tcPr/>
+                </a:tc>
+                <a:tc>
+                  <a:txBody>
+                    <a:bodyPr/>
+                    <a:lstStyle/>
+                    <a:p>
+                      <a:pPr algn="ctr"/>
+                      <a:r>
+                        <a:rPr lang="pt-BR" dirty="0"/>
+                        <a:t>0.033</a:t>
+                      </a:r>
+                    </a:p>
+                  </a:txBody>
+                  <a:tcPr/>
+                </a:tc>
+                <a:extLst>
+                  <a:ext uri="{0D108BD9-81ED-4DB2-BD59-A6C34878D82A}">
+                    <a16:rowId xmlns:a16="http://schemas.microsoft.com/office/drawing/2014/main" val="1591054470"/>
+                  </a:ext>
+                </a:extLst>
+              </a:tr>
+            </a:tbl>
+          </a:graphicData>
+        </a:graphic>
+      </p:graphicFrame>
     </p:spTree>
     <p:extLst>
       <p:ext uri="{BB962C8B-B14F-4D97-AF65-F5344CB8AC3E}">
@@ -13577,8 +13991,8 @@
           </a:p>
         </p:txBody>
       </p:sp>
-      <mc:AlternateContent xmlns:mc="http://schemas.openxmlformats.org/markup-compatibility/2006">
-        <mc:Choice xmlns:a14="http://schemas.microsoft.com/office/drawing/2010/main" Requires="a14">
+      <mc:AlternateContent xmlns:mc="http://schemas.openxmlformats.org/markup-compatibility/2006" xmlns:a14="http://schemas.microsoft.com/office/drawing/2010/main">
+        <mc:Choice Requires="a14">
           <p:sp>
             <p:nvSpPr>
               <p:cNvPr id="6" name="Espaço Reservado para Conteúdo 5">
@@ -13908,7 +14322,7 @@
             </p:txBody>
           </p:sp>
         </mc:Choice>
-        <mc:Fallback>
+        <mc:Fallback xmlns="">
           <p:sp>
             <p:nvSpPr>
               <p:cNvPr id="6" name="Espaço Reservado para Conteúdo 5">
@@ -14571,13 +14985,7 @@
                       <a:rPr lang="pt-BR" sz="2000" i="1" dirty="0" smtClean="0">
                         <a:latin typeface="Cambria Math" panose="02040503050406030204" pitchFamily="18" charset="0"/>
                       </a:rPr>
-                      <m:t>(3) = 0 + 0,375 + 0,625 + 0 = </m:t>
-                    </m:r>
-                    <m:r>
-                      <a:rPr lang="pt-BR" sz="2000" i="1" dirty="0">
-                        <a:latin typeface="Cambria Math" panose="02040503050406030204" pitchFamily="18" charset="0"/>
-                      </a:rPr>
-                      <m:t>1</m:t>
+                      <m:t>(3) = 0 + 0,375 + 0,625 + 0 = 1</m:t>
                     </m:r>
                   </m:oMath>
                 </a14:m>
@@ -17732,8 +18140,8 @@
           </a:p>
         </p:txBody>
       </p:sp>
-      <mc:AlternateContent xmlns:mc="http://schemas.openxmlformats.org/markup-compatibility/2006">
-        <mc:Choice xmlns:a14="http://schemas.microsoft.com/office/drawing/2010/main" Requires="a14">
+      <mc:AlternateContent xmlns:mc="http://schemas.openxmlformats.org/markup-compatibility/2006" xmlns:a14="http://schemas.microsoft.com/office/drawing/2010/main">
+        <mc:Choice Requires="a14">
           <p:sp>
             <p:nvSpPr>
               <p:cNvPr id="6" name="Espaço Reservado para Conteúdo 5">
@@ -17925,7 +18333,7 @@
             </p:txBody>
           </p:sp>
         </mc:Choice>
-        <mc:Fallback>
+        <mc:Fallback xmlns="">
           <p:sp>
             <p:nvSpPr>
               <p:cNvPr id="6" name="Espaço Reservado para Conteúdo 5">
@@ -21699,8 +22107,8 @@
           </a:prstGeom>
         </p:spPr>
       </p:pic>
-      <mc:AlternateContent xmlns:mc="http://schemas.openxmlformats.org/markup-compatibility/2006">
-        <mc:Choice xmlns:a14="http://schemas.microsoft.com/office/drawing/2010/main" Requires="a14">
+      <mc:AlternateContent xmlns:mc="http://schemas.openxmlformats.org/markup-compatibility/2006" xmlns:a14="http://schemas.microsoft.com/office/drawing/2010/main">
+        <mc:Choice Requires="a14">
           <p:sp>
             <p:nvSpPr>
               <p:cNvPr id="9" name="Espaço Reservado para Conteúdo 5">
@@ -22070,7 +22478,7 @@
             </p:txBody>
           </p:sp>
         </mc:Choice>
-        <mc:Fallback>
+        <mc:Fallback xmlns="">
           <p:sp>
             <p:nvSpPr>
               <p:cNvPr id="9" name="Espaço Reservado para Conteúdo 5">
